--- a/media/exports/reports/2026-01/callbacks.pptx
+++ b/media/exports/reports/2026-01/callbacks.pptx
@@ -952,7 +952,7 @@
           <a:lstStyle/>
           <a:p>
             <a:r>
-              <a:t>How long do customers wait for a callback?. Sample Electrical &amp; Air Pty Ltd. Period: January 2026. Every customer enquiry (phone, web form, email) and how long until someone first called back, in working minutes. Every call-out job has the enquiry that booked it.</a:t>
+              <a:t>How long do customers wait for a callback?. Sample Electrical &amp; Air Pty Ltd. Period: January 2026. In short: 67.0% called back within 2 working hours in January (target 80.0%); median wait 72 working minutes. Every customer enquiry (phone, web form, email) and how long until someone first called back, in working minutes. Every call-out job has the enquiry that booked it.</a:t>
             </a:r>
           </a:p>
         </p:txBody>
@@ -4317,7 +4317,7 @@
         <p:spPr>
           <a:xfrm>
             <a:off x="457200" y="3703320"/>
-            <a:ext cx="11277295" cy="535940"/>
+            <a:ext cx="11277295" cy="758190"/>
           </a:xfrm>
           <a:prstGeom prst="rect">
             <a:avLst/>
@@ -4342,7 +4342,7 @@
                 </a:solidFill>
                 <a:latin typeface="Roboto"/>
               </a:rPr>
-              <a:t>Period: January 2026. Every customer enquiry (phone, web form, email) and how long until someone first called back, in working minutes. Every call-out job has the enquiry that booked it.</a:t>
+              <a:t>Period: January 2026. In short: 67.0% called back within 2 working hours in January (target 80.0%); median wait 72 working minutes. Every customer enquiry (phone, web form, email) and how long until someone first called back, in working minutes. Every call-out job has the enquiry that booked it.</a:t>
             </a:r>
           </a:p>
         </p:txBody>
@@ -4355,7 +4355,7 @@
         </p:nvSpPr>
         <p:spPr>
           <a:xfrm>
-            <a:off x="457200" y="4330700"/>
+            <a:off x="457200" y="4552950"/>
             <a:ext cx="11277295" cy="1097280"/>
           </a:xfrm>
           <a:prstGeom prst="rect">
@@ -4507,7 +4507,7 @@
                 </a:solidFill>
                 <a:latin typeface="Roboto"/>
               </a:rPr>
-              <a:t>Data retrieved 2pm, Tue 6 Oct 2026 · Generated 8 Oct 2026, 6:28pm · Sample data · Made with Python (python-pptx)</a:t>
+              <a:t>Data retrieved 2pm, Tue 6 Oct 2026 · Generated 10 Oct 2026, 9:55pm · Sample data · Made with Python (python-pptx)</a:t>
             </a:r>
           </a:p>
         </p:txBody>
@@ -5574,7 +5574,7 @@
                 </a:solidFill>
                 <a:latin typeface="Roboto"/>
               </a:rPr>
-              <a:t>Data retrieved 2pm, Tue 6 Oct 2026 · Generated 8 Oct 2026, 6:28pm · Sample data · Made with Python (python-pptx)</a:t>
+              <a:t>Data retrieved 2pm, Tue 6 Oct 2026 · Generated 10 Oct 2026, 9:55pm · Sample data · Made with Python (python-pptx)</a:t>
             </a:r>
           </a:p>
         </p:txBody>
@@ -6003,7 +6003,7 @@
                 </a:solidFill>
                 <a:latin typeface="Roboto"/>
               </a:rPr>
-              <a:t>Data retrieved 2pm, Tue 6 Oct 2026 · Generated 8 Oct 2026, 6:28pm · Sample data · Made with Python (python-pptx)</a:t>
+              <a:t>Data retrieved 2pm, Tue 6 Oct 2026 · Generated 10 Oct 2026, 9:55pm · Sample data · Made with Python (python-pptx)</a:t>
             </a:r>
           </a:p>
         </p:txBody>
